--- a/proposal/transakt-slides-4-6.pptx
+++ b/proposal/transakt-slides-4-6.pptx
@@ -7765,7 +7765,7 @@
                 </a:solidFill>
                 <a:latin typeface="Aptos"/>
               </a:rPr>
-              <a:t>B. Document review, dispute, expedited and onboarding fees</a:t>
+              <a:t>B. Dispute, expedited and onboarding fees</a:t>
             </a:r>
           </a:p>
           <a:p>
